--- a/Project2_1/DB산출물/03_화면정의서.pptx
+++ b/Project2_1/DB산출물/03_화면정의서.pptx
@@ -283,7 +283,7 @@
       </p15:notesGuideLst>
     </p:ext>
     <p:ext uri="GoogleSlidesCustomDataVersion2">
-      <go:slidesCustomData xmlns:go="http://customooxmlschemas.google.com/" xmlns:ahyp="http://schemas.microsoft.com/office/drawing/2018/hyperlinkcolor" xmlns:p15="http://schemas.microsoft.com/office/powerpoint/2012/main" xmlns:p14="http://schemas.microsoft.com/office/powerpoint/2010/main" xmlns:com="http://schemas.openxmlformats.org/drawingml/2006/compatibility" xmlns:pvml="urn:schemas-microsoft-com:office:powerpoint" xmlns:v="urn:schemas-microsoft-com:vml" xmlns:o="urn:schemas-microsoft-com:office:office" xmlns:dgm="http://schemas.openxmlformats.org/drawingml/2006/diagram" xmlns:c="http://schemas.openxmlformats.org/drawingml/2006/chart" xmlns:mv="urn:schemas-microsoft-com:mac:vml" xmlns:mc="http://schemas.openxmlformats.org/markup-compatibility/2006" xmlns="" r:id="rId16" roundtripDataSignature="AMtx7mgy5G5xksiDDRQ/wFPYJjQYjIaUuQ=="/>
+      <go:slidesCustomData xmlns="" xmlns:mc="http://schemas.openxmlformats.org/markup-compatibility/2006" xmlns:mv="urn:schemas-microsoft-com:mac:vml" xmlns:c="http://schemas.openxmlformats.org/drawingml/2006/chart" xmlns:dgm="http://schemas.openxmlformats.org/drawingml/2006/diagram" xmlns:o="urn:schemas-microsoft-com:office:office" xmlns:v="urn:schemas-microsoft-com:vml" xmlns:pvml="urn:schemas-microsoft-com:office:powerpoint" xmlns:com="http://schemas.openxmlformats.org/drawingml/2006/compatibility" xmlns:p14="http://schemas.microsoft.com/office/powerpoint/2010/main" xmlns:p15="http://schemas.microsoft.com/office/powerpoint/2012/main" xmlns:ahyp="http://schemas.microsoft.com/office/drawing/2018/hyperlinkcolor" xmlns:go="http://customooxmlschemas.google.com/" r:id="rId16" roundtripDataSignature="AMtx7mgy5G5xksiDDRQ/wFPYJjQYjIaUuQ=="/>
     </p:ext>
   </p:extLst>
 </p:presentation>
@@ -25771,6 +25771,166 @@
           </a:graphicData>
         </a:graphic>
       </p:graphicFrame>
+      <p:pic>
+        <p:nvPicPr>
+          <p:cNvPr id="5" name="그림 4">
+            <a:extLst>
+              <a:ext uri="{FF2B5EF4-FFF2-40B4-BE49-F238E27FC236}">
+                <a16:creationId xmlns:a16="http://schemas.microsoft.com/office/drawing/2014/main" id="{851CEA77-00A6-4E42-B35D-1EF333CBF899}"/>
+              </a:ext>
+            </a:extLst>
+          </p:cNvPr>
+          <p:cNvPicPr>
+            <a:picLocks noChangeAspect="1"/>
+          </p:cNvPicPr>
+          <p:nvPr/>
+        </p:nvPicPr>
+        <p:blipFill>
+          <a:blip r:embed="rId3"/>
+          <a:stretch>
+            <a:fillRect/>
+          </a:stretch>
+        </p:blipFill>
+        <p:spPr>
+          <a:xfrm>
+            <a:off x="368299" y="1955799"/>
+            <a:ext cx="6223000" cy="4394201"/>
+          </a:xfrm>
+          <a:prstGeom prst="rect">
+            <a:avLst/>
+          </a:prstGeom>
+        </p:spPr>
+      </p:pic>
+      <p:sp>
+        <p:nvSpPr>
+          <p:cNvPr id="6" name="말풍선: 타원형 5">
+            <a:extLst>
+              <a:ext uri="{FF2B5EF4-FFF2-40B4-BE49-F238E27FC236}">
+                <a16:creationId xmlns:a16="http://schemas.microsoft.com/office/drawing/2014/main" id="{7CF3EE83-71AA-4567-9DED-F6DDAEFC8D88}"/>
+              </a:ext>
+            </a:extLst>
+          </p:cNvPr>
+          <p:cNvSpPr/>
+          <p:nvPr/>
+        </p:nvSpPr>
+        <p:spPr>
+          <a:xfrm>
+            <a:off x="4279903" y="2139950"/>
+            <a:ext cx="1568447" cy="577850"/>
+          </a:xfrm>
+          <a:prstGeom prst="wedgeEllipseCallout">
+            <a:avLst>
+              <a:gd name="adj1" fmla="val 53200"/>
+              <a:gd name="adj2" fmla="val 110469"/>
+            </a:avLst>
+          </a:prstGeom>
+        </p:spPr>
+        <p:style>
+          <a:lnRef idx="2">
+            <a:schemeClr val="accent1">
+              <a:shade val="50000"/>
+            </a:schemeClr>
+          </a:lnRef>
+          <a:fillRef idx="1">
+            <a:schemeClr val="accent1"/>
+          </a:fillRef>
+          <a:effectRef idx="0">
+            <a:schemeClr val="accent1"/>
+          </a:effectRef>
+          <a:fontRef idx="minor">
+            <a:schemeClr val="lt1"/>
+          </a:fontRef>
+        </p:style>
+        <p:txBody>
+          <a:bodyPr rtlCol="0" anchor="ctr"/>
+          <a:lstStyle/>
+          <a:p>
+            <a:pPr algn="ctr"/>
+            <a:r>
+              <a:rPr lang="ko-KR" altLang="en-US" sz="1000">
+                <a:solidFill>
+                  <a:schemeClr val="tx1"/>
+                </a:solidFill>
+              </a:rPr>
+              <a:t>누르면 데이터 목록 나타남 </a:t>
+            </a:r>
+            <a:endParaRPr lang="ko-KR" altLang="en-US" sz="1000" dirty="0">
+              <a:solidFill>
+                <a:schemeClr val="tx1"/>
+              </a:solidFill>
+            </a:endParaRPr>
+          </a:p>
+        </p:txBody>
+      </p:sp>
+      <p:sp>
+        <p:nvSpPr>
+          <p:cNvPr id="7" name="말풍선: 타원형 6">
+            <a:extLst>
+              <a:ext uri="{FF2B5EF4-FFF2-40B4-BE49-F238E27FC236}">
+                <a16:creationId xmlns:a16="http://schemas.microsoft.com/office/drawing/2014/main" id="{F3C142CD-5BD0-40BC-A9C1-AA63C2605D0D}"/>
+              </a:ext>
+            </a:extLst>
+          </p:cNvPr>
+          <p:cNvSpPr/>
+          <p:nvPr/>
+        </p:nvSpPr>
+        <p:spPr>
+          <a:xfrm>
+            <a:off x="3682999" y="5499100"/>
+            <a:ext cx="1568447" cy="577850"/>
+          </a:xfrm>
+          <a:prstGeom prst="wedgeEllipseCallout">
+            <a:avLst>
+              <a:gd name="adj1" fmla="val -81089"/>
+              <a:gd name="adj2" fmla="val 42720"/>
+            </a:avLst>
+          </a:prstGeom>
+        </p:spPr>
+        <p:style>
+          <a:lnRef idx="2">
+            <a:schemeClr val="accent1">
+              <a:shade val="50000"/>
+            </a:schemeClr>
+          </a:lnRef>
+          <a:fillRef idx="1">
+            <a:schemeClr val="accent1"/>
+          </a:fillRef>
+          <a:effectRef idx="0">
+            <a:schemeClr val="accent1"/>
+          </a:effectRef>
+          <a:fontRef idx="minor">
+            <a:schemeClr val="lt1"/>
+          </a:fontRef>
+        </p:style>
+        <p:txBody>
+          <a:bodyPr rtlCol="0" anchor="ctr"/>
+          <a:lstStyle/>
+          <a:p>
+            <a:pPr algn="ctr"/>
+            <a:r>
+              <a:rPr lang="ko-KR" altLang="en-US" sz="1000" dirty="0">
+                <a:solidFill>
+                  <a:schemeClr val="tx1"/>
+                </a:solidFill>
+              </a:rPr>
+              <a:t>점 클릭하면 </a:t>
+            </a:r>
+            <a:r>
+              <a:rPr lang="ko-KR" altLang="en-US" sz="1000">
+                <a:solidFill>
+                  <a:schemeClr val="tx1"/>
+                </a:solidFill>
+              </a:rPr>
+              <a:t>그래프 해석 결과가 나온다</a:t>
+            </a:r>
+            <a:endParaRPr lang="ko-KR" altLang="en-US" sz="1000" dirty="0">
+              <a:solidFill>
+                <a:schemeClr val="tx1"/>
+              </a:solidFill>
+            </a:endParaRPr>
+          </a:p>
+        </p:txBody>
+      </p:sp>
     </p:spTree>
     <p:extLst>
       <p:ext uri="{BB962C8B-B14F-4D97-AF65-F5344CB8AC3E}">
@@ -28254,6 +28414,92 @@
           </a:graphicData>
         </a:graphic>
       </p:graphicFrame>
+      <p:pic>
+        <p:nvPicPr>
+          <p:cNvPr id="3" name="그림 2">
+            <a:extLst>
+              <a:ext uri="{FF2B5EF4-FFF2-40B4-BE49-F238E27FC236}">
+                <a16:creationId xmlns:a16="http://schemas.microsoft.com/office/drawing/2014/main" id="{63569621-9F3C-4113-930D-7A5F03ADCD12}"/>
+              </a:ext>
+            </a:extLst>
+          </p:cNvPr>
+          <p:cNvPicPr>
+            <a:picLocks noChangeAspect="1"/>
+          </p:cNvPicPr>
+          <p:nvPr/>
+        </p:nvPicPr>
+        <p:blipFill>
+          <a:blip r:embed="rId3"/>
+          <a:stretch>
+            <a:fillRect/>
+          </a:stretch>
+        </p:blipFill>
+        <p:spPr>
+          <a:xfrm>
+            <a:off x="393700" y="2070100"/>
+            <a:ext cx="6070600" cy="2367348"/>
+          </a:xfrm>
+          <a:prstGeom prst="rect">
+            <a:avLst/>
+          </a:prstGeom>
+        </p:spPr>
+      </p:pic>
+      <p:sp>
+        <p:nvSpPr>
+          <p:cNvPr id="4" name="말풍선: 타원형 3">
+            <a:extLst>
+              <a:ext uri="{FF2B5EF4-FFF2-40B4-BE49-F238E27FC236}">
+                <a16:creationId xmlns:a16="http://schemas.microsoft.com/office/drawing/2014/main" id="{2ABD9E3E-0337-4CFE-AA32-3C62EA400801}"/>
+              </a:ext>
+            </a:extLst>
+          </p:cNvPr>
+          <p:cNvSpPr/>
+          <p:nvPr/>
+        </p:nvSpPr>
+        <p:spPr>
+          <a:xfrm>
+            <a:off x="1384300" y="3886200"/>
+            <a:ext cx="1463675" cy="551248"/>
+          </a:xfrm>
+          <a:prstGeom prst="wedgeEllipseCallout">
+            <a:avLst>
+              <a:gd name="adj1" fmla="val 75000"/>
+              <a:gd name="adj2" fmla="val -41174"/>
+            </a:avLst>
+          </a:prstGeom>
+        </p:spPr>
+        <p:style>
+          <a:lnRef idx="2">
+            <a:schemeClr val="accent1">
+              <a:shade val="50000"/>
+            </a:schemeClr>
+          </a:lnRef>
+          <a:fillRef idx="1">
+            <a:schemeClr val="accent1"/>
+          </a:fillRef>
+          <a:effectRef idx="0">
+            <a:schemeClr val="accent1"/>
+          </a:effectRef>
+          <a:fontRef idx="minor">
+            <a:schemeClr val="lt1"/>
+          </a:fontRef>
+        </p:style>
+        <p:txBody>
+          <a:bodyPr rtlCol="0" anchor="ctr"/>
+          <a:lstStyle/>
+          <a:p>
+            <a:pPr algn="ctr"/>
+            <a:r>
+              <a:rPr lang="ko-KR" altLang="en-US" sz="1000">
+                <a:solidFill>
+                  <a:schemeClr val="tx1"/>
+                </a:solidFill>
+              </a:rPr>
+              <a:t>예측결과 보기</a:t>
+            </a:r>
+          </a:p>
+        </p:txBody>
+      </p:sp>
     </p:spTree>
     <p:extLst>
       <p:ext uri="{BB962C8B-B14F-4D97-AF65-F5344CB8AC3E}">

--- a/Project2_1/DB산출물/03_화면정의서.pptx
+++ b/Project2_1/DB산출물/03_화면정의서.pptx
@@ -10063,14 +10063,14 @@
           <p:nvPr>
             <p:extLst>
               <p:ext uri="{D42A27DB-BD31-4B8C-83A1-F6EECF244321}">
-                <p14:modId xmlns:p14="http://schemas.microsoft.com/office/powerpoint/2010/main" val="596308024"/>
+                <p14:modId xmlns:p14="http://schemas.microsoft.com/office/powerpoint/2010/main" val="2166611735"/>
               </p:ext>
             </p:extLst>
           </p:nvPr>
         </p:nvGraphicFramePr>
         <p:xfrm>
-          <a:off x="323075" y="105947"/>
-          <a:ext cx="6153925" cy="9459499"/>
+          <a:off x="323075" y="144047"/>
+          <a:ext cx="6153925" cy="9447053"/>
         </p:xfrm>
         <a:graphic>
           <a:graphicData uri="http://schemas.openxmlformats.org/drawingml/2006/table">
@@ -12159,27 +12159,27 @@
                       </a:r>
                     </a:p>
                     <a:p>
-                      <a:pPr marL="0" marR="0" lvl="0" indent="0" algn="l" rtl="0">
-                        <a:lnSpc>
-                          <a:spcPct val="120000"/>
-                        </a:lnSpc>
-                        <a:spcBef>
-                          <a:spcPts val="0"/>
-                        </a:spcBef>
-                        <a:spcAft>
-                          <a:spcPts val="0"/>
-                        </a:spcAft>
-                        <a:buClr>
-                          <a:srgbClr val="000000"/>
-                        </a:buClr>
-                        <a:buSzPts val="1000"/>
-                        <a:buFont typeface="Gulimche"/>
-                        <a:buNone/>
-                      </a:pPr>
-                      <a:endParaRPr lang="ko-KR" altLang="en-US" sz="1000" dirty="0">
-                        <a:latin typeface="+mj-ea"/>
-                        <a:ea typeface="+mj-ea"/>
-                      </a:endParaRPr>
+                      <a:r>
+                        <a:rPr lang="en-US" altLang="ko-KR" sz="1000" dirty="0">
+                          <a:latin typeface="+mj-ea"/>
+                          <a:ea typeface="+mj-ea"/>
+                        </a:rPr>
+                        <a:t> - </a:t>
+                      </a:r>
+                      <a:r>
+                        <a:rPr lang="ko-KR" altLang="en-US" sz="1000" dirty="0">
+                          <a:latin typeface="+mj-ea"/>
+                          <a:ea typeface="+mj-ea"/>
+                        </a:rPr>
+                        <a:t>로그인 하면 본인의 결과가 나온다</a:t>
+                      </a:r>
+                      <a:r>
+                        <a:rPr lang="en-US" altLang="ko-KR" sz="1000" dirty="0">
+                          <a:latin typeface="+mj-ea"/>
+                          <a:ea typeface="+mj-ea"/>
+                        </a:rPr>
+                        <a:t>.</a:t>
+                      </a:r>
                     </a:p>
                   </a:txBody>
                   <a:tcPr marL="91450" marR="91450" marT="45750" marB="45750">
@@ -12263,10 +12263,10 @@
       </p:graphicFrame>
       <p:pic>
         <p:nvPicPr>
-          <p:cNvPr id="3" name="그림 2">
+          <p:cNvPr id="4" name="그림 3">
             <a:extLst>
               <a:ext uri="{FF2B5EF4-FFF2-40B4-BE49-F238E27FC236}">
-                <a16:creationId xmlns:a16="http://schemas.microsoft.com/office/drawing/2014/main" id="{BBC0BD75-409F-44BA-8A29-66512C64CA4D}"/>
+                <a16:creationId xmlns:a16="http://schemas.microsoft.com/office/drawing/2014/main" id="{D36CB741-81F5-4566-8833-467932AEA5DC}"/>
               </a:ext>
             </a:extLst>
           </p:cNvPr>
@@ -12283,42 +12283,12 @@
         </p:blipFill>
         <p:spPr>
           <a:xfrm>
-            <a:off x="742950" y="1841500"/>
-            <a:ext cx="5467350" cy="4051299"/>
+            <a:off x="517137" y="1790159"/>
+            <a:ext cx="5765800" cy="4141282"/>
           </a:xfrm>
           <a:prstGeom prst="rect">
             <a:avLst/>
           </a:prstGeom>
-          <a:solidFill>
-            <a:srgbClr val="FFFFFF">
-              <a:shade val="85000"/>
-            </a:srgbClr>
-          </a:solidFill>
-          <a:ln w="88900" cap="sq">
-            <a:solidFill>
-              <a:srgbClr val="FFFFFF"/>
-            </a:solidFill>
-            <a:miter lim="800000"/>
-          </a:ln>
-          <a:effectLst>
-            <a:outerShdw blurRad="55000" dist="18000" dir="5400000" algn="tl" rotWithShape="0">
-              <a:srgbClr val="000000">
-                <a:alpha val="40000"/>
-              </a:srgbClr>
-            </a:outerShdw>
-          </a:effectLst>
-          <a:scene3d>
-            <a:camera prst="orthographicFront"/>
-            <a:lightRig rig="twoPt" dir="t">
-              <a:rot lat="0" lon="0" rev="7200000"/>
-            </a:lightRig>
-          </a:scene3d>
-          <a:sp3d>
-            <a:bevelT w="25400" h="19050"/>
-            <a:contourClr>
-              <a:srgbClr val="FFFFFF"/>
-            </a:contourClr>
-          </a:sp3d>
         </p:spPr>
       </p:pic>
     </p:spTree>
@@ -25773,10 +25743,10 @@
       </p:graphicFrame>
       <p:pic>
         <p:nvPicPr>
-          <p:cNvPr id="5" name="그림 4">
+          <p:cNvPr id="4" name="그림 3">
             <a:extLst>
               <a:ext uri="{FF2B5EF4-FFF2-40B4-BE49-F238E27FC236}">
-                <a16:creationId xmlns:a16="http://schemas.microsoft.com/office/drawing/2014/main" id="{851CEA77-00A6-4E42-B35D-1EF333CBF899}"/>
+                <a16:creationId xmlns:a16="http://schemas.microsoft.com/office/drawing/2014/main" id="{4D339860-85CB-481D-BC2C-B8C2D7C1B53E}"/>
               </a:ext>
             </a:extLst>
           </p:cNvPr>
@@ -25793,8 +25763,8 @@
         </p:blipFill>
         <p:spPr>
           <a:xfrm>
-            <a:off x="368299" y="1955799"/>
-            <a:ext cx="6223000" cy="4394201"/>
+            <a:off x="508000" y="1889538"/>
+            <a:ext cx="6083299" cy="4263612"/>
           </a:xfrm>
           <a:prstGeom prst="rect">
             <a:avLst/>
@@ -25803,10 +25773,10 @@
       </p:pic>
       <p:sp>
         <p:nvSpPr>
-          <p:cNvPr id="6" name="말풍선: 타원형 5">
+          <p:cNvPr id="10" name="말풍선: 타원형 9">
             <a:extLst>
               <a:ext uri="{FF2B5EF4-FFF2-40B4-BE49-F238E27FC236}">
-                <a16:creationId xmlns:a16="http://schemas.microsoft.com/office/drawing/2014/main" id="{7CF3EE83-71AA-4567-9DED-F6DDAEFC8D88}"/>
+                <a16:creationId xmlns:a16="http://schemas.microsoft.com/office/drawing/2014/main" id="{330D7B2C-CC59-40FE-9F19-B2F85D06D483}"/>
               </a:ext>
             </a:extLst>
           </p:cNvPr>
@@ -25815,13 +25785,13 @@
         </p:nvSpPr>
         <p:spPr>
           <a:xfrm>
-            <a:off x="4279903" y="2139950"/>
+            <a:off x="4102103" y="2137188"/>
             <a:ext cx="1568447" cy="577850"/>
           </a:xfrm>
           <a:prstGeom prst="wedgeEllipseCallout">
             <a:avLst>
-              <a:gd name="adj1" fmla="val 53200"/>
-              <a:gd name="adj2" fmla="val 110469"/>
+              <a:gd name="adj1" fmla="val 24860"/>
+              <a:gd name="adj2" fmla="val 123656"/>
             </a:avLst>
           </a:prstGeom>
         </p:spPr>
@@ -25847,27 +25817,22 @@
           <a:p>
             <a:pPr algn="ctr"/>
             <a:r>
-              <a:rPr lang="ko-KR" altLang="en-US" sz="1000">
+              <a:rPr lang="ko-KR" altLang="en-US" sz="1000" dirty="0">
                 <a:solidFill>
                   <a:schemeClr val="tx1"/>
                 </a:solidFill>
               </a:rPr>
-              <a:t>누르면 데이터 목록 나타남 </a:t>
+              <a:t>누르면 해당하는 데이터 목록 나타남 </a:t>
             </a:r>
-            <a:endParaRPr lang="ko-KR" altLang="en-US" sz="1000" dirty="0">
-              <a:solidFill>
-                <a:schemeClr val="tx1"/>
-              </a:solidFill>
-            </a:endParaRPr>
           </a:p>
         </p:txBody>
       </p:sp>
       <p:sp>
         <p:nvSpPr>
-          <p:cNvPr id="7" name="말풍선: 타원형 6">
+          <p:cNvPr id="11" name="말풍선: 타원형 10">
             <a:extLst>
               <a:ext uri="{FF2B5EF4-FFF2-40B4-BE49-F238E27FC236}">
-                <a16:creationId xmlns:a16="http://schemas.microsoft.com/office/drawing/2014/main" id="{F3C142CD-5BD0-40BC-A9C1-AA63C2605D0D}"/>
+                <a16:creationId xmlns:a16="http://schemas.microsoft.com/office/drawing/2014/main" id="{08953813-5BEF-42B6-88DD-80357F5D2146}"/>
               </a:ext>
             </a:extLst>
           </p:cNvPr>
@@ -25876,13 +25841,13 @@
         </p:nvSpPr>
         <p:spPr>
           <a:xfrm>
-            <a:off x="3682999" y="5499100"/>
+            <a:off x="3136902" y="5130800"/>
             <a:ext cx="1568447" cy="577850"/>
           </a:xfrm>
           <a:prstGeom prst="wedgeEllipseCallout">
             <a:avLst>
-              <a:gd name="adj1" fmla="val -81089"/>
-              <a:gd name="adj2" fmla="val 42720"/>
+              <a:gd name="adj1" fmla="val -89996"/>
+              <a:gd name="adj2" fmla="val 962"/>
             </a:avLst>
           </a:prstGeom>
         </p:spPr>

--- a/Project2_1/DB산출물/03_화면정의서.pptx
+++ b/Project2_1/DB산출물/03_화면정의서.pptx
@@ -283,7 +283,7 @@
       </p15:notesGuideLst>
     </p:ext>
     <p:ext uri="GoogleSlidesCustomDataVersion2">
-      <go:slidesCustomData xmlns="" xmlns:mc="http://schemas.openxmlformats.org/markup-compatibility/2006" xmlns:mv="urn:schemas-microsoft-com:mac:vml" xmlns:c="http://schemas.openxmlformats.org/drawingml/2006/chart" xmlns:dgm="http://schemas.openxmlformats.org/drawingml/2006/diagram" xmlns:o="urn:schemas-microsoft-com:office:office" xmlns:v="urn:schemas-microsoft-com:vml" xmlns:pvml="urn:schemas-microsoft-com:office:powerpoint" xmlns:com="http://schemas.openxmlformats.org/drawingml/2006/compatibility" xmlns:p14="http://schemas.microsoft.com/office/powerpoint/2010/main" xmlns:p15="http://schemas.microsoft.com/office/powerpoint/2012/main" xmlns:ahyp="http://schemas.microsoft.com/office/drawing/2018/hyperlinkcolor" xmlns:go="http://customooxmlschemas.google.com/" r:id="rId16" roundtripDataSignature="AMtx7mgy5G5xksiDDRQ/wFPYJjQYjIaUuQ=="/>
+      <go:slidesCustomData xmlns:go="http://customooxmlschemas.google.com/" xmlns:ahyp="http://schemas.microsoft.com/office/drawing/2018/hyperlinkcolor" xmlns:p15="http://schemas.microsoft.com/office/powerpoint/2012/main" xmlns:p14="http://schemas.microsoft.com/office/powerpoint/2010/main" xmlns:com="http://schemas.openxmlformats.org/drawingml/2006/compatibility" xmlns:pvml="urn:schemas-microsoft-com:office:powerpoint" xmlns:v="urn:schemas-microsoft-com:vml" xmlns:o="urn:schemas-microsoft-com:office:office" xmlns:dgm="http://schemas.openxmlformats.org/drawingml/2006/diagram" xmlns:c="http://schemas.openxmlformats.org/drawingml/2006/chart" xmlns:mv="urn:schemas-microsoft-com:mac:vml" xmlns:mc="http://schemas.openxmlformats.org/markup-compatibility/2006" xmlns="" r:id="rId16" roundtripDataSignature="AMtx7mgy5G5xksiDDRQ/wFPYJjQYjIaUuQ=="/>
     </p:ext>
   </p:extLst>
 </p:presentation>
@@ -19172,14 +19172,14 @@
           <p:nvPr>
             <p:extLst>
               <p:ext uri="{D42A27DB-BD31-4B8C-83A1-F6EECF244321}">
-                <p14:modId xmlns:p14="http://schemas.microsoft.com/office/powerpoint/2010/main" val="3259214082"/>
+                <p14:modId xmlns:p14="http://schemas.microsoft.com/office/powerpoint/2010/main" val="3897887324"/>
               </p:ext>
             </p:extLst>
           </p:nvPr>
         </p:nvGraphicFramePr>
         <p:xfrm>
           <a:off x="495300" y="192711"/>
-          <a:ext cx="6059450" cy="9519371"/>
+          <a:ext cx="6059450" cy="9537835"/>
         </p:xfrm>
         <a:graphic>
           <a:graphicData uri="http://schemas.openxmlformats.org/drawingml/2006/table">
@@ -20537,7 +20537,7 @@
                   </a:ext>
                 </a:extLst>
               </a:tr>
-              <a:tr h="5072050">
+              <a:tr h="4633314">
                 <a:tc gridSpan="5">
                   <a:txBody>
                     <a:bodyPr/>
@@ -21120,6 +21120,52 @@
                       </a:r>
                     </a:p>
                     <a:p>
+                      <a:endParaRPr lang="en-US" altLang="ko-KR" sz="1000" dirty="0">
+                        <a:latin typeface="+mj-ea"/>
+                        <a:ea typeface="+mj-ea"/>
+                      </a:endParaRPr>
+                    </a:p>
+                    <a:p>
+                      <a:r>
+                        <a:rPr lang="en-US" altLang="ko-KR" sz="1000" dirty="0">
+                          <a:latin typeface="+mj-ea"/>
+                          <a:ea typeface="+mj-ea"/>
+                        </a:rPr>
+                        <a:t>7. </a:t>
+                      </a:r>
+                      <a:r>
+                        <a:rPr lang="ko-KR" altLang="en-US" sz="1000" dirty="0">
+                          <a:latin typeface="+mj-ea"/>
+                          <a:ea typeface="+mj-ea"/>
+                        </a:rPr>
+                        <a:t>분석 기록 삭제</a:t>
+                      </a:r>
+                      <a:endParaRPr lang="en-US" altLang="ko-KR" sz="1000" dirty="0">
+                        <a:latin typeface="+mj-ea"/>
+                        <a:ea typeface="+mj-ea"/>
+                      </a:endParaRPr>
+                    </a:p>
+                    <a:p>
+                      <a:pPr marL="171450" indent="-171450">
+                        <a:buFontTx/>
+                        <a:buChar char="-"/>
+                      </a:pPr>
+                      <a:r>
+                        <a:rPr lang="ko-KR" altLang="en-US" sz="1000" dirty="0">
+                          <a:latin typeface="+mj-ea"/>
+                          <a:ea typeface="+mj-ea"/>
+                        </a:rPr>
+                        <a:t>분석 기록을 삭제한다</a:t>
+                      </a:r>
+                      <a:r>
+                        <a:rPr lang="en-US" altLang="ko-KR" sz="1000" dirty="0">
+                          <a:latin typeface="+mj-ea"/>
+                          <a:ea typeface="+mj-ea"/>
+                        </a:rPr>
+                        <a:t>.</a:t>
+                      </a:r>
+                    </a:p>
+                    <a:p>
                       <a:pPr marL="0" marR="0" lvl="0" indent="0" algn="l" rtl="0">
                         <a:lnSpc>
                           <a:spcPct val="120000"/>
@@ -21224,10 +21270,10 @@
       </p:graphicFrame>
       <p:pic>
         <p:nvPicPr>
-          <p:cNvPr id="3" name="그림 2">
+          <p:cNvPr id="6" name="그림 5">
             <a:extLst>
               <a:ext uri="{FF2B5EF4-FFF2-40B4-BE49-F238E27FC236}">
-                <a16:creationId xmlns:a16="http://schemas.microsoft.com/office/drawing/2014/main" id="{59CC0DFB-73D1-4E42-A212-0B5310F8893E}"/>
+                <a16:creationId xmlns:a16="http://schemas.microsoft.com/office/drawing/2014/main" id="{BC6B9D11-19AA-4750-9794-2B2F92C5247D}"/>
               </a:ext>
             </a:extLst>
           </p:cNvPr>
@@ -21244,8 +21290,8 @@
         </p:blipFill>
         <p:spPr>
           <a:xfrm>
-            <a:off x="622300" y="2169462"/>
-            <a:ext cx="5740400" cy="4205937"/>
+            <a:off x="711199" y="2361961"/>
+            <a:ext cx="5651501" cy="3899378"/>
           </a:xfrm>
           <a:prstGeom prst="rect">
             <a:avLst/>
@@ -21284,10 +21330,10 @@
       </p:pic>
       <p:sp>
         <p:nvSpPr>
-          <p:cNvPr id="5" name="말풍선: 타원형 4">
+          <p:cNvPr id="8" name="말풍선: 타원형 7">
             <a:extLst>
               <a:ext uri="{FF2B5EF4-FFF2-40B4-BE49-F238E27FC236}">
-                <a16:creationId xmlns:a16="http://schemas.microsoft.com/office/drawing/2014/main" id="{5F30A015-A77F-4A32-98C0-F3B878E26851}"/>
+                <a16:creationId xmlns:a16="http://schemas.microsoft.com/office/drawing/2014/main" id="{CCCF0F66-ACDD-4B85-8C5C-BC363AD6D195}"/>
               </a:ext>
             </a:extLst>
           </p:cNvPr>
@@ -21296,13 +21342,13 @@
         </p:nvSpPr>
         <p:spPr>
           <a:xfrm>
-            <a:off x="3525025" y="2501900"/>
+            <a:off x="4414025" y="2361961"/>
             <a:ext cx="1524000" cy="546100"/>
           </a:xfrm>
           <a:prstGeom prst="wedgeEllipseCallout">
             <a:avLst>
-              <a:gd name="adj1" fmla="val 67350"/>
-              <a:gd name="adj2" fmla="val 27094"/>
+              <a:gd name="adj1" fmla="val 60683"/>
+              <a:gd name="adj2" fmla="val 50350"/>
             </a:avLst>
           </a:prstGeom>
         </p:spPr>
@@ -21340,10 +21386,10 @@
       </p:sp>
       <p:sp>
         <p:nvSpPr>
-          <p:cNvPr id="2" name="말풍선: 타원형 1">
+          <p:cNvPr id="9" name="말풍선: 타원형 8">
             <a:extLst>
               <a:ext uri="{FF2B5EF4-FFF2-40B4-BE49-F238E27FC236}">
-                <a16:creationId xmlns:a16="http://schemas.microsoft.com/office/drawing/2014/main" id="{4623047A-A8D0-4586-8516-FC4C7CADFA32}"/>
+                <a16:creationId xmlns:a16="http://schemas.microsoft.com/office/drawing/2014/main" id="{B26E1902-0A47-4414-81F1-AB84FDB26C65}"/>
               </a:ext>
             </a:extLst>
           </p:cNvPr>
@@ -21352,13 +21398,13 @@
         </p:nvSpPr>
         <p:spPr>
           <a:xfrm>
-            <a:off x="5740400" y="2679700"/>
+            <a:off x="4126263" y="3187700"/>
             <a:ext cx="1651000" cy="641350"/>
           </a:xfrm>
           <a:prstGeom prst="wedgeEllipseCallout">
             <a:avLst>
-              <a:gd name="adj1" fmla="val -59008"/>
-              <a:gd name="adj2" fmla="val 46221"/>
+              <a:gd name="adj1" fmla="val 50992"/>
+              <a:gd name="adj2" fmla="val 40281"/>
             </a:avLst>
           </a:prstGeom>
         </p:spPr>
@@ -21389,21 +21435,64 @@
                   <a:schemeClr val="tx1"/>
                 </a:solidFill>
               </a:rPr>
-              <a:t>당일에 한 </a:t>
+              <a:t>당일에 한 분석 결과 보기</a:t>
             </a:r>
+          </a:p>
+        </p:txBody>
+      </p:sp>
+      <p:sp>
+        <p:nvSpPr>
+          <p:cNvPr id="10" name="말풍선: 타원형 9">
+            <a:extLst>
+              <a:ext uri="{FF2B5EF4-FFF2-40B4-BE49-F238E27FC236}">
+                <a16:creationId xmlns:a16="http://schemas.microsoft.com/office/drawing/2014/main" id="{2BF434C2-B16A-412A-A74D-A84784AFB5B5}"/>
+              </a:ext>
+            </a:extLst>
+          </p:cNvPr>
+          <p:cNvSpPr/>
+          <p:nvPr/>
+        </p:nvSpPr>
+        <p:spPr>
+          <a:xfrm>
+            <a:off x="4508500" y="5715239"/>
+            <a:ext cx="1524000" cy="546100"/>
+          </a:xfrm>
+          <a:prstGeom prst="wedgeEllipseCallout">
+            <a:avLst>
+              <a:gd name="adj1" fmla="val 54016"/>
+              <a:gd name="adj2" fmla="val -58953"/>
+            </a:avLst>
+          </a:prstGeom>
+        </p:spPr>
+        <p:style>
+          <a:lnRef idx="2">
+            <a:schemeClr val="accent1">
+              <a:shade val="50000"/>
+            </a:schemeClr>
+          </a:lnRef>
+          <a:fillRef idx="1">
+            <a:schemeClr val="accent1"/>
+          </a:fillRef>
+          <a:effectRef idx="0">
+            <a:schemeClr val="accent1"/>
+          </a:effectRef>
+          <a:fontRef idx="minor">
+            <a:schemeClr val="lt1"/>
+          </a:fontRef>
+        </p:style>
+        <p:txBody>
+          <a:bodyPr rtlCol="0" anchor="ctr"/>
+          <a:lstStyle/>
+          <a:p>
+            <a:pPr algn="ctr"/>
             <a:r>
-              <a:rPr lang="ko-KR" altLang="en-US" sz="1000">
+              <a:rPr lang="ko-KR" altLang="en-US" sz="1000" dirty="0">
                 <a:solidFill>
                   <a:schemeClr val="tx1"/>
                 </a:solidFill>
               </a:rPr>
-              <a:t>분석 결과 보기</a:t>
+              <a:t>분석 기록 삭제</a:t>
             </a:r>
-            <a:endParaRPr lang="ko-KR" altLang="en-US" sz="1000" dirty="0">
-              <a:solidFill>
-                <a:schemeClr val="tx1"/>
-              </a:solidFill>
-            </a:endParaRPr>
           </a:p>
         </p:txBody>
       </p:sp>
